--- a/GrowRight Afrique.pptx
+++ b/GrowRight Afrique.pptx
@@ -5,7 +5,7 @@
     <p:sldMasterId id="2147483672" r:id="rId1"/>
   </p:sldMasterIdLst>
   <p:notesMasterIdLst>
-    <p:notesMasterId r:id="rId35"/>
+    <p:notesMasterId r:id="rId31"/>
   </p:notesMasterIdLst>
   <p:sldIdLst>
     <p:sldId id="257" r:id="rId2"/>
@@ -22,25 +22,21 @@
     <p:sldId id="267" r:id="rId13"/>
     <p:sldId id="268" r:id="rId14"/>
     <p:sldId id="299" r:id="rId15"/>
-    <p:sldId id="295" r:id="rId16"/>
-    <p:sldId id="289" r:id="rId17"/>
-    <p:sldId id="290" r:id="rId18"/>
-    <p:sldId id="291" r:id="rId19"/>
-    <p:sldId id="292" r:id="rId20"/>
-    <p:sldId id="293" r:id="rId21"/>
-    <p:sldId id="294" r:id="rId22"/>
-    <p:sldId id="296" r:id="rId23"/>
-    <p:sldId id="301" r:id="rId24"/>
-    <p:sldId id="300" r:id="rId25"/>
-    <p:sldId id="302" r:id="rId26"/>
-    <p:sldId id="303" r:id="rId27"/>
-    <p:sldId id="279" r:id="rId28"/>
-    <p:sldId id="304" r:id="rId29"/>
-    <p:sldId id="305" r:id="rId30"/>
-    <p:sldId id="282" r:id="rId31"/>
-    <p:sldId id="283" r:id="rId32"/>
-    <p:sldId id="284" r:id="rId33"/>
-    <p:sldId id="285" r:id="rId34"/>
+    <p:sldId id="291" r:id="rId16"/>
+    <p:sldId id="292" r:id="rId17"/>
+    <p:sldId id="294" r:id="rId18"/>
+    <p:sldId id="301" r:id="rId19"/>
+    <p:sldId id="306" r:id="rId20"/>
+    <p:sldId id="300" r:id="rId21"/>
+    <p:sldId id="302" r:id="rId22"/>
+    <p:sldId id="303" r:id="rId23"/>
+    <p:sldId id="279" r:id="rId24"/>
+    <p:sldId id="304" r:id="rId25"/>
+    <p:sldId id="305" r:id="rId26"/>
+    <p:sldId id="282" r:id="rId27"/>
+    <p:sldId id="283" r:id="rId28"/>
+    <p:sldId id="284" r:id="rId29"/>
+    <p:sldId id="285" r:id="rId30"/>
   </p:sldIdLst>
   <p:sldSz cx="12192000" cy="6858000"/>
   <p:notesSz cx="6858000" cy="9144000"/>
@@ -229,7 +225,7 @@
           <a:p>
             <a:fld id="{7C9E3A37-4A2F-43D2-9E27-5A4CF81602FE}" type="datetimeFigureOut">
               <a:rPr lang="en-GB" smtClean="0"/>
-              <a:t>28/04/2026</a:t>
+              <a:t>29/04/2026</a:t>
             </a:fld>
             <a:endParaRPr lang="en-GB"/>
           </a:p>
@@ -1212,7 +1208,7 @@
                 <a:tabLst/>
                 <a:defRPr/>
               </a:pPr>
-              <a:t>28/04/2026</a:t>
+              <a:t>29/04/2026</a:t>
             </a:fld>
             <a:endParaRPr kumimoji="0" lang="en-GB" sz="900" b="0" i="0" u="none" strike="noStrike" kern="1200" cap="none" spc="0" normalizeH="0" baseline="0" noProof="0">
               <a:ln>
@@ -1573,7 +1569,7 @@
                 <a:tabLst/>
                 <a:defRPr/>
               </a:pPr>
-              <a:t>28/04/2026</a:t>
+              <a:t>29/04/2026</a:t>
             </a:fld>
             <a:endParaRPr kumimoji="0" lang="en-GB" sz="900" b="0" i="0" u="none" strike="noStrike" kern="1200" cap="none" spc="0" normalizeH="0" baseline="0" noProof="0">
               <a:ln>
@@ -1938,7 +1934,7 @@
                 <a:tabLst/>
                 <a:defRPr/>
               </a:pPr>
-              <a:t>28/04/2026</a:t>
+              <a:t>29/04/2026</a:t>
             </a:fld>
             <a:endParaRPr kumimoji="0" lang="en-GB" sz="900" b="0" i="0" u="none" strike="noStrike" kern="1200" cap="none" spc="0" normalizeH="0" baseline="0" noProof="0">
               <a:ln>
@@ -2289,7 +2285,7 @@
                 <a:tabLst/>
                 <a:defRPr/>
               </a:pPr>
-              <a:t>28/04/2026</a:t>
+              <a:t>29/04/2026</a:t>
             </a:fld>
             <a:endParaRPr kumimoji="0" lang="en-GB" sz="900" b="0" i="0" u="none" strike="noStrike" kern="1200" cap="none" spc="0" normalizeH="0" baseline="0" noProof="0">
               <a:ln>
@@ -2718,7 +2714,7 @@
                 <a:tabLst/>
                 <a:defRPr/>
               </a:pPr>
-              <a:t>28/04/2026</a:t>
+              <a:t>29/04/2026</a:t>
             </a:fld>
             <a:endParaRPr kumimoji="0" lang="en-GB" sz="900" b="0" i="0" u="none" strike="noStrike" kern="1200" cap="none" spc="0" normalizeH="0" baseline="0" noProof="0">
               <a:ln>
@@ -3136,7 +3132,7 @@
                 <a:tabLst/>
                 <a:defRPr/>
               </a:pPr>
-              <a:t>28/04/2026</a:t>
+              <a:t>29/04/2026</a:t>
             </a:fld>
             <a:endParaRPr kumimoji="0" lang="en-GB" sz="900" b="0" i="0" u="none" strike="noStrike" kern="1200" cap="none" spc="0" normalizeH="0" baseline="0" noProof="0">
               <a:ln>
@@ -3702,7 +3698,7 @@
                 <a:tabLst/>
                 <a:defRPr/>
               </a:pPr>
-              <a:t>28/04/2026</a:t>
+              <a:t>29/04/2026</a:t>
             </a:fld>
             <a:endParaRPr kumimoji="0" lang="en-GB" sz="900" b="0" i="0" u="none" strike="noStrike" kern="1200" cap="none" spc="0" normalizeH="0" baseline="0" noProof="0">
               <a:ln>
@@ -4001,7 +3997,7 @@
                 <a:tabLst/>
                 <a:defRPr/>
               </a:pPr>
-              <a:t>28/04/2026</a:t>
+              <a:t>29/04/2026</a:t>
             </a:fld>
             <a:endParaRPr kumimoji="0" lang="en-GB" sz="900" b="0" i="0" u="none" strike="noStrike" kern="1200" cap="none" spc="0" normalizeH="0" baseline="0" noProof="0">
               <a:ln>
@@ -4277,7 +4273,7 @@
                 <a:tabLst/>
                 <a:defRPr/>
               </a:pPr>
-              <a:t>28/04/2026</a:t>
+              <a:t>29/04/2026</a:t>
             </a:fld>
             <a:endParaRPr kumimoji="0" lang="en-GB" sz="900" b="0" i="0" u="none" strike="noStrike" kern="1200" cap="none" spc="0" normalizeH="0" baseline="0" noProof="0">
               <a:ln>
@@ -4678,7 +4674,7 @@
                 <a:tabLst/>
                 <a:defRPr/>
               </a:pPr>
-              <a:t>28/04/2026</a:t>
+              <a:t>29/04/2026</a:t>
             </a:fld>
             <a:endParaRPr kumimoji="0" lang="en-GB" sz="900" b="0" i="0" u="none" strike="noStrike" kern="1200" cap="none" spc="0" normalizeH="0" baseline="0" noProof="0">
               <a:ln>
@@ -5273,7 +5269,7 @@
                 <a:tabLst/>
                 <a:defRPr/>
               </a:pPr>
-              <a:t>28/04/2026</a:t>
+              <a:t>29/04/2026</a:t>
             </a:fld>
             <a:endParaRPr kumimoji="0" lang="en-GB" sz="900" b="0" i="0" u="none" strike="noStrike" kern="1200" cap="none" spc="0" normalizeH="0" baseline="0" noProof="0">
               <a:ln>
@@ -5702,7 +5698,7 @@
           <a:p>
             <a:fld id="{29E5A0EC-CB12-4A61-8750-F598E9887096}" type="datetimeFigureOut">
               <a:rPr lang="en-GB" smtClean="0"/>
-              <a:t>28/04/2026</a:t>
+              <a:t>29/04/2026</a:t>
             </a:fld>
             <a:endParaRPr lang="en-GB"/>
           </a:p>
@@ -7286,420 +7282,6 @@
             <a:pPr algn="ctr"/>
             <a:r>
               <a:rPr lang="en-GB" dirty="0" smtClean="0"/>
-              <a:t>Sign of erosion</a:t>
-            </a:r>
-            <a:endParaRPr lang="en-GB" dirty="0"/>
-          </a:p>
-        </p:txBody>
-      </p:sp>
-      <p:pic>
-        <p:nvPicPr>
-          <p:cNvPr id="6" name="Content Placeholder 5"/>
-          <p:cNvPicPr>
-            <a:picLocks noGrp="1" noChangeAspect="1"/>
-          </p:cNvPicPr>
-          <p:nvPr>
-            <p:ph idx="1"/>
-          </p:nvPr>
-        </p:nvPicPr>
-        <p:blipFill>
-          <a:blip r:embed="rId2"/>
-          <a:stretch>
-            <a:fillRect/>
-          </a:stretch>
-        </p:blipFill>
-        <p:spPr>
-          <a:xfrm>
-            <a:off x="2693247" y="2202656"/>
-            <a:ext cx="7119938" cy="3897352"/>
-          </a:xfrm>
-          <a:prstGeom prst="rect">
-            <a:avLst/>
-          </a:prstGeom>
-        </p:spPr>
-      </p:pic>
-      <p:pic>
-        <p:nvPicPr>
-          <p:cNvPr id="7" name="Picture 6" descr="Africa wildlife culture Royalty Free Vector Image"/>
-          <p:cNvPicPr>
-            <a:picLocks noChangeAspect="1" noChangeArrowheads="1"/>
-          </p:cNvPicPr>
-          <p:nvPr/>
-        </p:nvPicPr>
-        <p:blipFill>
-          <a:blip r:embed="rId3" cstate="print">
-            <a:clrChange>
-              <a:clrFrom>
-                <a:srgbClr val="FFFFFF"/>
-              </a:clrFrom>
-              <a:clrTo>
-                <a:srgbClr val="FFFFFF">
-                  <a:alpha val="0"/>
-                </a:srgbClr>
-              </a:clrTo>
-            </a:clrChange>
-            <a:extLst>
-              <a:ext uri="{28A0092B-C50C-407E-A947-70E740481C1C}">
-                <a14:useLocalDpi xmlns:a14="http://schemas.microsoft.com/office/drawing/2010/main" val="0"/>
-              </a:ext>
-            </a:extLst>
-          </a:blip>
-          <a:srcRect/>
-          <a:stretch>
-            <a:fillRect/>
-          </a:stretch>
-        </p:blipFill>
-        <p:spPr bwMode="auto">
-          <a:xfrm>
-            <a:off x="10099097" y="4886914"/>
-            <a:ext cx="2092903" cy="1158861"/>
-          </a:xfrm>
-          <a:prstGeom prst="rect">
-            <a:avLst/>
-          </a:prstGeom>
-          <a:noFill/>
-          <a:extLst>
-            <a:ext uri="{909E8E84-426E-40DD-AFC4-6F175D3DCCD1}">
-              <a14:hiddenFill xmlns:a14="http://schemas.microsoft.com/office/drawing/2010/main">
-                <a:solidFill>
-                  <a:srgbClr val="FFFFFF"/>
-                </a:solidFill>
-              </a14:hiddenFill>
-            </a:ext>
-          </a:extLst>
-        </p:spPr>
-      </p:pic>
-    </p:spTree>
-    <p:extLst>
-      <p:ext uri="{BB962C8B-B14F-4D97-AF65-F5344CB8AC3E}">
-        <p14:creationId xmlns:p14="http://schemas.microsoft.com/office/powerpoint/2010/main" val="325770311"/>
-      </p:ext>
-    </p:extLst>
-  </p:cSld>
-  <p:clrMapOvr>
-    <a:masterClrMapping/>
-  </p:clrMapOvr>
-  <p:timing>
-    <p:tnLst>
-      <p:par>
-        <p:cTn id="1" dur="indefinite" restart="never" nodeType="tmRoot"/>
-      </p:par>
-    </p:tnLst>
-  </p:timing>
-</p:sld>
-</file>
-
-<file path=ppt/slides/slide16.xml><?xml version="1.0" encoding="utf-8"?>
-<p:sld xmlns:a="http://schemas.openxmlformats.org/drawingml/2006/main" xmlns:r="http://schemas.openxmlformats.org/officeDocument/2006/relationships" xmlns:p="http://schemas.openxmlformats.org/presentationml/2006/main">
-  <p:cSld>
-    <p:spTree>
-      <p:nvGrpSpPr>
-        <p:cNvPr id="1" name=""/>
-        <p:cNvGrpSpPr/>
-        <p:nvPr/>
-      </p:nvGrpSpPr>
-      <p:grpSpPr>
-        <a:xfrm>
-          <a:off x="0" y="0"/>
-          <a:ext cx="0" cy="0"/>
-          <a:chOff x="0" y="0"/>
-          <a:chExt cx="0" cy="0"/>
-        </a:xfrm>
-      </p:grpSpPr>
-      <p:sp>
-        <p:nvSpPr>
-          <p:cNvPr id="2" name="Title 1"/>
-          <p:cNvSpPr>
-            <a:spLocks noGrp="1"/>
-          </p:cNvSpPr>
-          <p:nvPr>
-            <p:ph type="title"/>
-          </p:nvPr>
-        </p:nvSpPr>
-        <p:spPr/>
-        <p:txBody>
-          <a:bodyPr/>
-          <a:lstStyle/>
-          <a:p>
-            <a:pPr algn="ctr"/>
-            <a:r>
-              <a:rPr lang="en-GB" dirty="0" smtClean="0"/>
-              <a:t>Surface Salt</a:t>
-            </a:r>
-            <a:endParaRPr lang="en-GB" dirty="0"/>
-          </a:p>
-        </p:txBody>
-      </p:sp>
-      <p:pic>
-        <p:nvPicPr>
-          <p:cNvPr id="4" name="Content Placeholder 3"/>
-          <p:cNvPicPr>
-            <a:picLocks noGrp="1" noChangeAspect="1"/>
-          </p:cNvPicPr>
-          <p:nvPr>
-            <p:ph idx="1"/>
-          </p:nvPr>
-        </p:nvPicPr>
-        <p:blipFill>
-          <a:blip r:embed="rId2"/>
-          <a:stretch>
-            <a:fillRect/>
-          </a:stretch>
-        </p:blipFill>
-        <p:spPr>
-          <a:xfrm>
-            <a:off x="2528166" y="2069306"/>
-            <a:ext cx="7450100" cy="4064794"/>
-          </a:xfrm>
-          <a:prstGeom prst="rect">
-            <a:avLst/>
-          </a:prstGeom>
-        </p:spPr>
-      </p:pic>
-      <p:pic>
-        <p:nvPicPr>
-          <p:cNvPr id="5" name="Picture 4" descr="Africa wildlife culture Royalty Free Vector Image"/>
-          <p:cNvPicPr>
-            <a:picLocks noChangeAspect="1" noChangeArrowheads="1"/>
-          </p:cNvPicPr>
-          <p:nvPr/>
-        </p:nvPicPr>
-        <p:blipFill>
-          <a:blip r:embed="rId3" cstate="print">
-            <a:clrChange>
-              <a:clrFrom>
-                <a:srgbClr val="FFFFFF"/>
-              </a:clrFrom>
-              <a:clrTo>
-                <a:srgbClr val="FFFFFF">
-                  <a:alpha val="0"/>
-                </a:srgbClr>
-              </a:clrTo>
-            </a:clrChange>
-            <a:extLst>
-              <a:ext uri="{28A0092B-C50C-407E-A947-70E740481C1C}">
-                <a14:useLocalDpi xmlns:a14="http://schemas.microsoft.com/office/drawing/2010/main" val="0"/>
-              </a:ext>
-            </a:extLst>
-          </a:blip>
-          <a:srcRect/>
-          <a:stretch>
-            <a:fillRect/>
-          </a:stretch>
-        </p:blipFill>
-        <p:spPr bwMode="auto">
-          <a:xfrm>
-            <a:off x="10099097" y="4886914"/>
-            <a:ext cx="2092903" cy="1158861"/>
-          </a:xfrm>
-          <a:prstGeom prst="rect">
-            <a:avLst/>
-          </a:prstGeom>
-          <a:noFill/>
-          <a:extLst>
-            <a:ext uri="{909E8E84-426E-40DD-AFC4-6F175D3DCCD1}">
-              <a14:hiddenFill xmlns:a14="http://schemas.microsoft.com/office/drawing/2010/main">
-                <a:solidFill>
-                  <a:srgbClr val="FFFFFF"/>
-                </a:solidFill>
-              </a14:hiddenFill>
-            </a:ext>
-          </a:extLst>
-        </p:spPr>
-      </p:pic>
-    </p:spTree>
-    <p:extLst>
-      <p:ext uri="{BB962C8B-B14F-4D97-AF65-F5344CB8AC3E}">
-        <p14:creationId xmlns:p14="http://schemas.microsoft.com/office/powerpoint/2010/main" val="955171007"/>
-      </p:ext>
-    </p:extLst>
-  </p:cSld>
-  <p:clrMapOvr>
-    <a:masterClrMapping/>
-  </p:clrMapOvr>
-  <p:timing>
-    <p:tnLst>
-      <p:par>
-        <p:cTn id="1" dur="indefinite" restart="never" nodeType="tmRoot"/>
-      </p:par>
-    </p:tnLst>
-  </p:timing>
-</p:sld>
-</file>
-
-<file path=ppt/slides/slide17.xml><?xml version="1.0" encoding="utf-8"?>
-<p:sld xmlns:a="http://schemas.openxmlformats.org/drawingml/2006/main" xmlns:r="http://schemas.openxmlformats.org/officeDocument/2006/relationships" xmlns:p="http://schemas.openxmlformats.org/presentationml/2006/main">
-  <p:cSld>
-    <p:spTree>
-      <p:nvGrpSpPr>
-        <p:cNvPr id="1" name=""/>
-        <p:cNvGrpSpPr/>
-        <p:nvPr/>
-      </p:nvGrpSpPr>
-      <p:grpSpPr>
-        <a:xfrm>
-          <a:off x="0" y="0"/>
-          <a:ext cx="0" cy="0"/>
-          <a:chOff x="0" y="0"/>
-          <a:chExt cx="0" cy="0"/>
-        </a:xfrm>
-      </p:grpSpPr>
-      <p:sp>
-        <p:nvSpPr>
-          <p:cNvPr id="2" name="Title 1"/>
-          <p:cNvSpPr>
-            <a:spLocks noGrp="1"/>
-          </p:cNvSpPr>
-          <p:nvPr>
-            <p:ph type="title"/>
-          </p:nvPr>
-        </p:nvSpPr>
-        <p:spPr/>
-        <p:txBody>
-          <a:bodyPr/>
-          <a:lstStyle/>
-          <a:p>
-            <a:pPr algn="ctr"/>
-            <a:r>
-              <a:rPr lang="en-GB" dirty="0" smtClean="0"/>
-              <a:t>Surface crust</a:t>
-            </a:r>
-            <a:endParaRPr lang="en-GB" dirty="0"/>
-          </a:p>
-        </p:txBody>
-      </p:sp>
-      <p:pic>
-        <p:nvPicPr>
-          <p:cNvPr id="4" name="Content Placeholder 3"/>
-          <p:cNvPicPr>
-            <a:picLocks noGrp="1" noChangeAspect="1"/>
-          </p:cNvPicPr>
-          <p:nvPr>
-            <p:ph idx="1"/>
-          </p:nvPr>
-        </p:nvPicPr>
-        <p:blipFill>
-          <a:blip r:embed="rId2"/>
-          <a:stretch>
-            <a:fillRect/>
-          </a:stretch>
-        </p:blipFill>
-        <p:spPr>
-          <a:xfrm>
-            <a:off x="2467966" y="2025204"/>
-            <a:ext cx="7570499" cy="4098131"/>
-          </a:xfrm>
-          <a:prstGeom prst="rect">
-            <a:avLst/>
-          </a:prstGeom>
-        </p:spPr>
-      </p:pic>
-      <p:pic>
-        <p:nvPicPr>
-          <p:cNvPr id="5" name="Picture 4" descr="Africa wildlife culture Royalty Free Vector Image"/>
-          <p:cNvPicPr>
-            <a:picLocks noChangeAspect="1" noChangeArrowheads="1"/>
-          </p:cNvPicPr>
-          <p:nvPr/>
-        </p:nvPicPr>
-        <p:blipFill>
-          <a:blip r:embed="rId3" cstate="print">
-            <a:clrChange>
-              <a:clrFrom>
-                <a:srgbClr val="FFFFFF"/>
-              </a:clrFrom>
-              <a:clrTo>
-                <a:srgbClr val="FFFFFF">
-                  <a:alpha val="0"/>
-                </a:srgbClr>
-              </a:clrTo>
-            </a:clrChange>
-            <a:extLst>
-              <a:ext uri="{28A0092B-C50C-407E-A947-70E740481C1C}">
-                <a14:useLocalDpi xmlns:a14="http://schemas.microsoft.com/office/drawing/2010/main" val="0"/>
-              </a:ext>
-            </a:extLst>
-          </a:blip>
-          <a:srcRect/>
-          <a:stretch>
-            <a:fillRect/>
-          </a:stretch>
-        </p:blipFill>
-        <p:spPr bwMode="auto">
-          <a:xfrm>
-            <a:off x="10099097" y="4886914"/>
-            <a:ext cx="2092903" cy="1158861"/>
-          </a:xfrm>
-          <a:prstGeom prst="rect">
-            <a:avLst/>
-          </a:prstGeom>
-          <a:noFill/>
-          <a:extLst>
-            <a:ext uri="{909E8E84-426E-40DD-AFC4-6F175D3DCCD1}">
-              <a14:hiddenFill xmlns:a14="http://schemas.microsoft.com/office/drawing/2010/main">
-                <a:solidFill>
-                  <a:srgbClr val="FFFFFF"/>
-                </a:solidFill>
-              </a14:hiddenFill>
-            </a:ext>
-          </a:extLst>
-        </p:spPr>
-      </p:pic>
-    </p:spTree>
-    <p:extLst>
-      <p:ext uri="{BB962C8B-B14F-4D97-AF65-F5344CB8AC3E}">
-        <p14:creationId xmlns:p14="http://schemas.microsoft.com/office/powerpoint/2010/main" val="780747747"/>
-      </p:ext>
-    </p:extLst>
-  </p:cSld>
-  <p:clrMapOvr>
-    <a:masterClrMapping/>
-  </p:clrMapOvr>
-  <p:timing>
-    <p:tnLst>
-      <p:par>
-        <p:cTn id="1" dur="indefinite" restart="never" nodeType="tmRoot"/>
-      </p:par>
-    </p:tnLst>
-  </p:timing>
-</p:sld>
-</file>
-
-<file path=ppt/slides/slide18.xml><?xml version="1.0" encoding="utf-8"?>
-<p:sld xmlns:a="http://schemas.openxmlformats.org/drawingml/2006/main" xmlns:r="http://schemas.openxmlformats.org/officeDocument/2006/relationships" xmlns:p="http://schemas.openxmlformats.org/presentationml/2006/main">
-  <p:cSld>
-    <p:spTree>
-      <p:nvGrpSpPr>
-        <p:cNvPr id="1" name=""/>
-        <p:cNvGrpSpPr/>
-        <p:nvPr/>
-      </p:nvGrpSpPr>
-      <p:grpSpPr>
-        <a:xfrm>
-          <a:off x="0" y="0"/>
-          <a:ext cx="0" cy="0"/>
-          <a:chOff x="0" y="0"/>
-          <a:chExt cx="0" cy="0"/>
-        </a:xfrm>
-      </p:grpSpPr>
-      <p:sp>
-        <p:nvSpPr>
-          <p:cNvPr id="2" name="Title 1"/>
-          <p:cNvSpPr>
-            <a:spLocks noGrp="1"/>
-          </p:cNvSpPr>
-          <p:nvPr>
-            <p:ph type="title"/>
-          </p:nvPr>
-        </p:nvSpPr>
-        <p:spPr/>
-        <p:txBody>
-          <a:bodyPr/>
-          <a:lstStyle/>
-          <a:p>
-            <a:pPr algn="ctr"/>
-            <a:r>
-              <a:rPr lang="en-GB" dirty="0" smtClean="0"/>
               <a:t>Coarse fragments abundance</a:t>
             </a:r>
             <a:endParaRPr lang="en-GB" dirty="0"/>
@@ -7803,7 +7385,7 @@
 </p:sld>
 </file>
 
-<file path=ppt/slides/slide19.xml><?xml version="1.0" encoding="utf-8"?>
+<file path=ppt/slides/slide16.xml><?xml version="1.0" encoding="utf-8"?>
 <p:sld xmlns:a="http://schemas.openxmlformats.org/drawingml/2006/main" xmlns:r="http://schemas.openxmlformats.org/officeDocument/2006/relationships" xmlns:p="http://schemas.openxmlformats.org/presentationml/2006/main">
   <p:cSld>
     <p:spTree>
@@ -7941,6 +7523,403 @@
 </p:sld>
 </file>
 
+<file path=ppt/slides/slide17.xml><?xml version="1.0" encoding="utf-8"?>
+<p:sld xmlns:a="http://schemas.openxmlformats.org/drawingml/2006/main" xmlns:r="http://schemas.openxmlformats.org/officeDocument/2006/relationships" xmlns:p="http://schemas.openxmlformats.org/presentationml/2006/main">
+  <p:cSld>
+    <p:spTree>
+      <p:nvGrpSpPr>
+        <p:cNvPr id="1" name=""/>
+        <p:cNvGrpSpPr/>
+        <p:nvPr/>
+      </p:nvGrpSpPr>
+      <p:grpSpPr>
+        <a:xfrm>
+          <a:off x="0" y="0"/>
+          <a:ext cx="0" cy="0"/>
+          <a:chOff x="0" y="0"/>
+          <a:chExt cx="0" cy="0"/>
+        </a:xfrm>
+      </p:grpSpPr>
+      <p:sp>
+        <p:nvSpPr>
+          <p:cNvPr id="2" name="Title 1"/>
+          <p:cNvSpPr>
+            <a:spLocks noGrp="1"/>
+          </p:cNvSpPr>
+          <p:nvPr>
+            <p:ph type="title"/>
+          </p:nvPr>
+        </p:nvSpPr>
+        <p:spPr/>
+        <p:txBody>
+          <a:bodyPr/>
+          <a:lstStyle/>
+          <a:p>
+            <a:pPr algn="ctr"/>
+            <a:r>
+              <a:rPr lang="en-GB" dirty="0" smtClean="0"/>
+              <a:t>SLOPE CLASS</a:t>
+            </a:r>
+            <a:endParaRPr lang="en-GB" dirty="0"/>
+          </a:p>
+        </p:txBody>
+      </p:sp>
+      <p:pic>
+        <p:nvPicPr>
+          <p:cNvPr id="4" name="Content Placeholder 3"/>
+          <p:cNvPicPr>
+            <a:picLocks noGrp="1" noChangeAspect="1"/>
+          </p:cNvPicPr>
+          <p:nvPr>
+            <p:ph idx="1"/>
+          </p:nvPr>
+        </p:nvPicPr>
+        <p:blipFill>
+          <a:blip r:embed="rId2"/>
+          <a:stretch>
+            <a:fillRect/>
+          </a:stretch>
+        </p:blipFill>
+        <p:spPr>
+          <a:xfrm>
+            <a:off x="3416079" y="1939392"/>
+            <a:ext cx="5674274" cy="4106383"/>
+          </a:xfrm>
+          <a:prstGeom prst="rect">
+            <a:avLst/>
+          </a:prstGeom>
+        </p:spPr>
+      </p:pic>
+      <p:pic>
+        <p:nvPicPr>
+          <p:cNvPr id="5" name="Picture 4" descr="Africa wildlife culture Royalty Free Vector Image"/>
+          <p:cNvPicPr>
+            <a:picLocks noChangeAspect="1" noChangeArrowheads="1"/>
+          </p:cNvPicPr>
+          <p:nvPr/>
+        </p:nvPicPr>
+        <p:blipFill>
+          <a:blip r:embed="rId3" cstate="print">
+            <a:clrChange>
+              <a:clrFrom>
+                <a:srgbClr val="FFFFFF"/>
+              </a:clrFrom>
+              <a:clrTo>
+                <a:srgbClr val="FFFFFF">
+                  <a:alpha val="0"/>
+                </a:srgbClr>
+              </a:clrTo>
+            </a:clrChange>
+            <a:extLst>
+              <a:ext uri="{28A0092B-C50C-407E-A947-70E740481C1C}">
+                <a14:useLocalDpi xmlns:a14="http://schemas.microsoft.com/office/drawing/2010/main" val="0"/>
+              </a:ext>
+            </a:extLst>
+          </a:blip>
+          <a:srcRect/>
+          <a:stretch>
+            <a:fillRect/>
+          </a:stretch>
+        </p:blipFill>
+        <p:spPr bwMode="auto">
+          <a:xfrm>
+            <a:off x="10099097" y="4886914"/>
+            <a:ext cx="2092903" cy="1158861"/>
+          </a:xfrm>
+          <a:prstGeom prst="rect">
+            <a:avLst/>
+          </a:prstGeom>
+          <a:noFill/>
+          <a:extLst>
+            <a:ext uri="{909E8E84-426E-40DD-AFC4-6F175D3DCCD1}">
+              <a14:hiddenFill xmlns:a14="http://schemas.microsoft.com/office/drawing/2010/main">
+                <a:solidFill>
+                  <a:srgbClr val="FFFFFF"/>
+                </a:solidFill>
+              </a14:hiddenFill>
+            </a:ext>
+          </a:extLst>
+        </p:spPr>
+      </p:pic>
+    </p:spTree>
+    <p:extLst>
+      <p:ext uri="{BB962C8B-B14F-4D97-AF65-F5344CB8AC3E}">
+        <p14:creationId xmlns:p14="http://schemas.microsoft.com/office/powerpoint/2010/main" val="3701729773"/>
+      </p:ext>
+    </p:extLst>
+  </p:cSld>
+  <p:clrMapOvr>
+    <a:masterClrMapping/>
+  </p:clrMapOvr>
+  <p:timing>
+    <p:tnLst>
+      <p:par>
+        <p:cTn id="1" dur="indefinite" restart="never" nodeType="tmRoot"/>
+      </p:par>
+    </p:tnLst>
+  </p:timing>
+</p:sld>
+</file>
+
+<file path=ppt/slides/slide18.xml><?xml version="1.0" encoding="utf-8"?>
+<p:sld xmlns:a="http://schemas.openxmlformats.org/drawingml/2006/main" xmlns:r="http://schemas.openxmlformats.org/officeDocument/2006/relationships" xmlns:p="http://schemas.openxmlformats.org/presentationml/2006/main">
+  <p:cSld>
+    <p:spTree>
+      <p:nvGrpSpPr>
+        <p:cNvPr id="1" name=""/>
+        <p:cNvGrpSpPr/>
+        <p:nvPr/>
+      </p:nvGrpSpPr>
+      <p:grpSpPr>
+        <a:xfrm>
+          <a:off x="0" y="0"/>
+          <a:ext cx="0" cy="0"/>
+          <a:chOff x="0" y="0"/>
+          <a:chExt cx="0" cy="0"/>
+        </a:xfrm>
+      </p:grpSpPr>
+      <p:sp>
+        <p:nvSpPr>
+          <p:cNvPr id="2" name="Title 1"/>
+          <p:cNvSpPr>
+            <a:spLocks noGrp="1"/>
+          </p:cNvSpPr>
+          <p:nvPr>
+            <p:ph type="title"/>
+          </p:nvPr>
+        </p:nvSpPr>
+        <p:spPr/>
+        <p:txBody>
+          <a:bodyPr/>
+          <a:lstStyle/>
+          <a:p>
+            <a:pPr algn="ctr"/>
+            <a:r>
+              <a:rPr lang="en-GB" dirty="0" smtClean="0"/>
+              <a:t>Life forms</a:t>
+            </a:r>
+            <a:endParaRPr lang="en-GB" dirty="0"/>
+          </a:p>
+        </p:txBody>
+      </p:sp>
+      <p:pic>
+        <p:nvPicPr>
+          <p:cNvPr id="4" name="Content Placeholder 3"/>
+          <p:cNvPicPr>
+            <a:picLocks noGrp="1" noChangeAspect="1"/>
+          </p:cNvPicPr>
+          <p:nvPr>
+            <p:ph idx="1"/>
+          </p:nvPr>
+        </p:nvPicPr>
+        <p:blipFill>
+          <a:blip r:embed="rId2"/>
+          <a:stretch>
+            <a:fillRect/>
+          </a:stretch>
+        </p:blipFill>
+        <p:spPr>
+          <a:xfrm>
+            <a:off x="3790280" y="2016124"/>
+            <a:ext cx="5829969" cy="4082877"/>
+          </a:xfrm>
+          <a:prstGeom prst="rect">
+            <a:avLst/>
+          </a:prstGeom>
+        </p:spPr>
+      </p:pic>
+      <p:pic>
+        <p:nvPicPr>
+          <p:cNvPr id="5" name="Picture 4" descr="Africa wildlife culture Royalty Free Vector Image"/>
+          <p:cNvPicPr>
+            <a:picLocks noChangeAspect="1" noChangeArrowheads="1"/>
+          </p:cNvPicPr>
+          <p:nvPr/>
+        </p:nvPicPr>
+        <p:blipFill>
+          <a:blip r:embed="rId3" cstate="print">
+            <a:clrChange>
+              <a:clrFrom>
+                <a:srgbClr val="FFFFFF"/>
+              </a:clrFrom>
+              <a:clrTo>
+                <a:srgbClr val="FFFFFF">
+                  <a:alpha val="0"/>
+                </a:srgbClr>
+              </a:clrTo>
+            </a:clrChange>
+            <a:extLst>
+              <a:ext uri="{28A0092B-C50C-407E-A947-70E740481C1C}">
+                <a14:useLocalDpi xmlns:a14="http://schemas.microsoft.com/office/drawing/2010/main" val="0"/>
+              </a:ext>
+            </a:extLst>
+          </a:blip>
+          <a:srcRect/>
+          <a:stretch>
+            <a:fillRect/>
+          </a:stretch>
+        </p:blipFill>
+        <p:spPr bwMode="auto">
+          <a:xfrm>
+            <a:off x="10099097" y="4886914"/>
+            <a:ext cx="2092903" cy="1158861"/>
+          </a:xfrm>
+          <a:prstGeom prst="rect">
+            <a:avLst/>
+          </a:prstGeom>
+          <a:noFill/>
+          <a:extLst>
+            <a:ext uri="{909E8E84-426E-40DD-AFC4-6F175D3DCCD1}">
+              <a14:hiddenFill xmlns:a14="http://schemas.microsoft.com/office/drawing/2010/main">
+                <a:solidFill>
+                  <a:srgbClr val="FFFFFF"/>
+                </a:solidFill>
+              </a14:hiddenFill>
+            </a:ext>
+          </a:extLst>
+        </p:spPr>
+      </p:pic>
+    </p:spTree>
+    <p:extLst>
+      <p:ext uri="{BB962C8B-B14F-4D97-AF65-F5344CB8AC3E}">
+        <p14:creationId xmlns:p14="http://schemas.microsoft.com/office/powerpoint/2010/main" val="3798329076"/>
+      </p:ext>
+    </p:extLst>
+  </p:cSld>
+  <p:clrMapOvr>
+    <a:masterClrMapping/>
+  </p:clrMapOvr>
+  <p:timing>
+    <p:tnLst>
+      <p:par>
+        <p:cTn id="1" dur="indefinite" restart="never" nodeType="tmRoot"/>
+      </p:par>
+    </p:tnLst>
+  </p:timing>
+</p:sld>
+</file>
+
+<file path=ppt/slides/slide19.xml><?xml version="1.0" encoding="utf-8"?>
+<p:sld xmlns:a="http://schemas.openxmlformats.org/drawingml/2006/main" xmlns:r="http://schemas.openxmlformats.org/officeDocument/2006/relationships" xmlns:p="http://schemas.openxmlformats.org/presentationml/2006/main">
+  <p:cSld>
+    <p:spTree>
+      <p:nvGrpSpPr>
+        <p:cNvPr id="1" name=""/>
+        <p:cNvGrpSpPr/>
+        <p:nvPr/>
+      </p:nvGrpSpPr>
+      <p:grpSpPr>
+        <a:xfrm>
+          <a:off x="0" y="0"/>
+          <a:ext cx="0" cy="0"/>
+          <a:chOff x="0" y="0"/>
+          <a:chExt cx="0" cy="0"/>
+        </a:xfrm>
+      </p:grpSpPr>
+      <p:sp>
+        <p:nvSpPr>
+          <p:cNvPr id="2" name="Title 1"/>
+          <p:cNvSpPr>
+            <a:spLocks noGrp="1"/>
+          </p:cNvSpPr>
+          <p:nvPr>
+            <p:ph type="title"/>
+          </p:nvPr>
+        </p:nvSpPr>
+        <p:spPr/>
+        <p:txBody>
+          <a:bodyPr/>
+          <a:lstStyle/>
+          <a:p>
+            <a:r>
+              <a:rPr lang="en-GB" dirty="0" smtClean="0"/>
+              <a:t>Most land</a:t>
+            </a:r>
+            <a:endParaRPr lang="en-GB" dirty="0"/>
+          </a:p>
+        </p:txBody>
+      </p:sp>
+      <p:sp>
+        <p:nvSpPr>
+          <p:cNvPr id="3" name="Content Placeholder 2"/>
+          <p:cNvSpPr>
+            <a:spLocks noGrp="1"/>
+          </p:cNvSpPr>
+          <p:nvPr>
+            <p:ph idx="1"/>
+          </p:nvPr>
+        </p:nvSpPr>
+        <p:spPr/>
+        <p:txBody>
+          <a:bodyPr/>
+          <a:lstStyle/>
+          <a:p>
+            <a:r>
+              <a:rPr lang="en-GB" dirty="0" smtClean="0"/>
+              <a:t>Had:</a:t>
+            </a:r>
+          </a:p>
+          <a:p>
+            <a:pPr lvl="1"/>
+            <a:r>
+              <a:rPr lang="en-GB" dirty="0" smtClean="0"/>
+              <a:t>No signs of erosion.</a:t>
+            </a:r>
+          </a:p>
+          <a:p>
+            <a:pPr lvl="1"/>
+            <a:r>
+              <a:rPr lang="en-GB" dirty="0" smtClean="0"/>
+              <a:t>No surface crust.</a:t>
+            </a:r>
+          </a:p>
+          <a:p>
+            <a:pPr lvl="1"/>
+            <a:r>
+              <a:rPr lang="en-GB" dirty="0" smtClean="0"/>
+              <a:t>No surface stone</a:t>
+            </a:r>
+          </a:p>
+          <a:p>
+            <a:pPr lvl="1"/>
+            <a:r>
+              <a:rPr lang="en-GB" dirty="0" smtClean="0"/>
+              <a:t>No Bare soil.</a:t>
+            </a:r>
+          </a:p>
+          <a:p>
+            <a:pPr lvl="1"/>
+            <a:endParaRPr lang="en-GB" dirty="0"/>
+          </a:p>
+          <a:p>
+            <a:r>
+              <a:rPr lang="en-GB" dirty="0" smtClean="0"/>
+              <a:t>Was level land and sloping land. </a:t>
+            </a:r>
+            <a:r>
+              <a:rPr lang="en-GB" dirty="0"/>
+              <a:t> </a:t>
+            </a:r>
+            <a:r>
+              <a:rPr lang="en-GB" dirty="0" smtClean="0"/>
+              <a:t>Very few was steep land. </a:t>
+            </a:r>
+          </a:p>
+        </p:txBody>
+      </p:sp>
+    </p:spTree>
+    <p:extLst>
+      <p:ext uri="{BB962C8B-B14F-4D97-AF65-F5344CB8AC3E}">
+        <p14:creationId xmlns:p14="http://schemas.microsoft.com/office/powerpoint/2010/main" val="1415850414"/>
+      </p:ext>
+    </p:extLst>
+  </p:cSld>
+  <p:clrMapOvr>
+    <a:masterClrMapping/>
+  </p:clrMapOvr>
+</p:sld>
+</file>
+
 <file path=ppt/slides/slide2.xml><?xml version="1.0" encoding="utf-8"?>
 <p:sld xmlns:a="http://schemas.openxmlformats.org/drawingml/2006/main" xmlns:r="http://schemas.openxmlformats.org/officeDocument/2006/relationships" xmlns:p="http://schemas.openxmlformats.org/presentationml/2006/main">
   <p:cSld>
@@ -8201,558 +8180,6 @@
             <a:pPr algn="ctr"/>
             <a:r>
               <a:rPr lang="en-GB" dirty="0" smtClean="0"/>
-              <a:t>Landform</a:t>
-            </a:r>
-            <a:endParaRPr lang="en-GB" dirty="0"/>
-          </a:p>
-        </p:txBody>
-      </p:sp>
-      <p:pic>
-        <p:nvPicPr>
-          <p:cNvPr id="4" name="Content Placeholder 3"/>
-          <p:cNvPicPr>
-            <a:picLocks noGrp="1" noChangeAspect="1"/>
-          </p:cNvPicPr>
-          <p:nvPr>
-            <p:ph idx="1"/>
-          </p:nvPr>
-        </p:nvPicPr>
-        <p:blipFill>
-          <a:blip r:embed="rId2"/>
-          <a:stretch>
-            <a:fillRect/>
-          </a:stretch>
-        </p:blipFill>
-        <p:spPr>
-          <a:xfrm>
-            <a:off x="3910162" y="2092324"/>
-            <a:ext cx="4686107" cy="4070305"/>
-          </a:xfrm>
-          <a:prstGeom prst="rect">
-            <a:avLst/>
-          </a:prstGeom>
-        </p:spPr>
-      </p:pic>
-      <p:pic>
-        <p:nvPicPr>
-          <p:cNvPr id="5" name="Picture 4" descr="Africa wildlife culture Royalty Free Vector Image"/>
-          <p:cNvPicPr>
-            <a:picLocks noChangeAspect="1" noChangeArrowheads="1"/>
-          </p:cNvPicPr>
-          <p:nvPr/>
-        </p:nvPicPr>
-        <p:blipFill>
-          <a:blip r:embed="rId3" cstate="print">
-            <a:clrChange>
-              <a:clrFrom>
-                <a:srgbClr val="FFFFFF"/>
-              </a:clrFrom>
-              <a:clrTo>
-                <a:srgbClr val="FFFFFF">
-                  <a:alpha val="0"/>
-                </a:srgbClr>
-              </a:clrTo>
-            </a:clrChange>
-            <a:extLst>
-              <a:ext uri="{28A0092B-C50C-407E-A947-70E740481C1C}">
-                <a14:useLocalDpi xmlns:a14="http://schemas.microsoft.com/office/drawing/2010/main" val="0"/>
-              </a:ext>
-            </a:extLst>
-          </a:blip>
-          <a:srcRect/>
-          <a:stretch>
-            <a:fillRect/>
-          </a:stretch>
-        </p:blipFill>
-        <p:spPr bwMode="auto">
-          <a:xfrm>
-            <a:off x="10099097" y="4886914"/>
-            <a:ext cx="2092903" cy="1158861"/>
-          </a:xfrm>
-          <a:prstGeom prst="rect">
-            <a:avLst/>
-          </a:prstGeom>
-          <a:noFill/>
-          <a:extLst>
-            <a:ext uri="{909E8E84-426E-40DD-AFC4-6F175D3DCCD1}">
-              <a14:hiddenFill xmlns:a14="http://schemas.microsoft.com/office/drawing/2010/main">
-                <a:solidFill>
-                  <a:srgbClr val="FFFFFF"/>
-                </a:solidFill>
-              </a14:hiddenFill>
-            </a:ext>
-          </a:extLst>
-        </p:spPr>
-      </p:pic>
-    </p:spTree>
-    <p:extLst>
-      <p:ext uri="{BB962C8B-B14F-4D97-AF65-F5344CB8AC3E}">
-        <p14:creationId xmlns:p14="http://schemas.microsoft.com/office/powerpoint/2010/main" val="2487125831"/>
-      </p:ext>
-    </p:extLst>
-  </p:cSld>
-  <p:clrMapOvr>
-    <a:masterClrMapping/>
-  </p:clrMapOvr>
-  <p:timing>
-    <p:tnLst>
-      <p:par>
-        <p:cTn id="1" dur="indefinite" restart="never" nodeType="tmRoot"/>
-      </p:par>
-    </p:tnLst>
-  </p:timing>
-</p:sld>
-</file>
-
-<file path=ppt/slides/slide21.xml><?xml version="1.0" encoding="utf-8"?>
-<p:sld xmlns:a="http://schemas.openxmlformats.org/drawingml/2006/main" xmlns:r="http://schemas.openxmlformats.org/officeDocument/2006/relationships" xmlns:p="http://schemas.openxmlformats.org/presentationml/2006/main">
-  <p:cSld>
-    <p:spTree>
-      <p:nvGrpSpPr>
-        <p:cNvPr id="1" name=""/>
-        <p:cNvGrpSpPr/>
-        <p:nvPr/>
-      </p:nvGrpSpPr>
-      <p:grpSpPr>
-        <a:xfrm>
-          <a:off x="0" y="0"/>
-          <a:ext cx="0" cy="0"/>
-          <a:chOff x="0" y="0"/>
-          <a:chExt cx="0" cy="0"/>
-        </a:xfrm>
-      </p:grpSpPr>
-      <p:sp>
-        <p:nvSpPr>
-          <p:cNvPr id="2" name="Title 1"/>
-          <p:cNvSpPr>
-            <a:spLocks noGrp="1"/>
-          </p:cNvSpPr>
-          <p:nvPr>
-            <p:ph type="title"/>
-          </p:nvPr>
-        </p:nvSpPr>
-        <p:spPr/>
-        <p:txBody>
-          <a:bodyPr/>
-          <a:lstStyle/>
-          <a:p>
-            <a:pPr algn="ctr"/>
-            <a:r>
-              <a:rPr lang="en-GB" dirty="0" smtClean="0"/>
-              <a:t>SLOPE CLASS</a:t>
-            </a:r>
-            <a:endParaRPr lang="en-GB" dirty="0"/>
-          </a:p>
-        </p:txBody>
-      </p:sp>
-      <p:pic>
-        <p:nvPicPr>
-          <p:cNvPr id="4" name="Content Placeholder 3"/>
-          <p:cNvPicPr>
-            <a:picLocks noGrp="1" noChangeAspect="1"/>
-          </p:cNvPicPr>
-          <p:nvPr>
-            <p:ph idx="1"/>
-          </p:nvPr>
-        </p:nvPicPr>
-        <p:blipFill>
-          <a:blip r:embed="rId2"/>
-          <a:stretch>
-            <a:fillRect/>
-          </a:stretch>
-        </p:blipFill>
-        <p:spPr>
-          <a:xfrm>
-            <a:off x="3416079" y="2035174"/>
-            <a:ext cx="5674274" cy="4106383"/>
-          </a:xfrm>
-          <a:prstGeom prst="rect">
-            <a:avLst/>
-          </a:prstGeom>
-        </p:spPr>
-      </p:pic>
-      <p:pic>
-        <p:nvPicPr>
-          <p:cNvPr id="5" name="Picture 4" descr="Africa wildlife culture Royalty Free Vector Image"/>
-          <p:cNvPicPr>
-            <a:picLocks noChangeAspect="1" noChangeArrowheads="1"/>
-          </p:cNvPicPr>
-          <p:nvPr/>
-        </p:nvPicPr>
-        <p:blipFill>
-          <a:blip r:embed="rId3" cstate="print">
-            <a:clrChange>
-              <a:clrFrom>
-                <a:srgbClr val="FFFFFF"/>
-              </a:clrFrom>
-              <a:clrTo>
-                <a:srgbClr val="FFFFFF">
-                  <a:alpha val="0"/>
-                </a:srgbClr>
-              </a:clrTo>
-            </a:clrChange>
-            <a:extLst>
-              <a:ext uri="{28A0092B-C50C-407E-A947-70E740481C1C}">
-                <a14:useLocalDpi xmlns:a14="http://schemas.microsoft.com/office/drawing/2010/main" val="0"/>
-              </a:ext>
-            </a:extLst>
-          </a:blip>
-          <a:srcRect/>
-          <a:stretch>
-            <a:fillRect/>
-          </a:stretch>
-        </p:blipFill>
-        <p:spPr bwMode="auto">
-          <a:xfrm>
-            <a:off x="10099097" y="4886914"/>
-            <a:ext cx="2092903" cy="1158861"/>
-          </a:xfrm>
-          <a:prstGeom prst="rect">
-            <a:avLst/>
-          </a:prstGeom>
-          <a:noFill/>
-          <a:extLst>
-            <a:ext uri="{909E8E84-426E-40DD-AFC4-6F175D3DCCD1}">
-              <a14:hiddenFill xmlns:a14="http://schemas.microsoft.com/office/drawing/2010/main">
-                <a:solidFill>
-                  <a:srgbClr val="FFFFFF"/>
-                </a:solidFill>
-              </a14:hiddenFill>
-            </a:ext>
-          </a:extLst>
-        </p:spPr>
-      </p:pic>
-    </p:spTree>
-    <p:extLst>
-      <p:ext uri="{BB962C8B-B14F-4D97-AF65-F5344CB8AC3E}">
-        <p14:creationId xmlns:p14="http://schemas.microsoft.com/office/powerpoint/2010/main" val="3701729773"/>
-      </p:ext>
-    </p:extLst>
-  </p:cSld>
-  <p:clrMapOvr>
-    <a:masterClrMapping/>
-  </p:clrMapOvr>
-  <p:timing>
-    <p:tnLst>
-      <p:par>
-        <p:cTn id="1" dur="indefinite" restart="never" nodeType="tmRoot"/>
-      </p:par>
-    </p:tnLst>
-  </p:timing>
-</p:sld>
-</file>
-
-<file path=ppt/slides/slide22.xml><?xml version="1.0" encoding="utf-8"?>
-<p:sld xmlns:a="http://schemas.openxmlformats.org/drawingml/2006/main" xmlns:r="http://schemas.openxmlformats.org/officeDocument/2006/relationships" xmlns:p="http://schemas.openxmlformats.org/presentationml/2006/main">
-  <p:cSld>
-    <p:spTree>
-      <p:nvGrpSpPr>
-        <p:cNvPr id="1" name=""/>
-        <p:cNvGrpSpPr/>
-        <p:nvPr/>
-      </p:nvGrpSpPr>
-      <p:grpSpPr>
-        <a:xfrm>
-          <a:off x="0" y="0"/>
-          <a:ext cx="0" cy="0"/>
-          <a:chOff x="0" y="0"/>
-          <a:chExt cx="0" cy="0"/>
-        </a:xfrm>
-      </p:grpSpPr>
-      <p:sp>
-        <p:nvSpPr>
-          <p:cNvPr id="2" name="Title 1"/>
-          <p:cNvSpPr>
-            <a:spLocks noGrp="1"/>
-          </p:cNvSpPr>
-          <p:nvPr>
-            <p:ph type="title"/>
-          </p:nvPr>
-        </p:nvSpPr>
-        <p:spPr/>
-        <p:txBody>
-          <a:bodyPr/>
-          <a:lstStyle/>
-          <a:p>
-            <a:pPr algn="ctr"/>
-            <a:r>
-              <a:rPr lang="en-GB" dirty="0" smtClean="0"/>
-              <a:t>Bare soil</a:t>
-            </a:r>
-            <a:endParaRPr lang="en-GB" dirty="0"/>
-          </a:p>
-        </p:txBody>
-      </p:sp>
-      <p:pic>
-        <p:nvPicPr>
-          <p:cNvPr id="4" name="Content Placeholder 3"/>
-          <p:cNvPicPr>
-            <a:picLocks noGrp="1" noChangeAspect="1"/>
-          </p:cNvPicPr>
-          <p:nvPr>
-            <p:ph idx="1"/>
-          </p:nvPr>
-        </p:nvPicPr>
-        <p:blipFill>
-          <a:blip r:embed="rId2"/>
-          <a:stretch>
-            <a:fillRect/>
-          </a:stretch>
-        </p:blipFill>
-        <p:spPr>
-          <a:xfrm>
-            <a:off x="2721822" y="2235994"/>
-            <a:ext cx="7062788" cy="3852430"/>
-          </a:xfrm>
-          <a:prstGeom prst="rect">
-            <a:avLst/>
-          </a:prstGeom>
-        </p:spPr>
-      </p:pic>
-      <p:pic>
-        <p:nvPicPr>
-          <p:cNvPr id="5" name="Picture 4" descr="Africa wildlife culture Royalty Free Vector Image"/>
-          <p:cNvPicPr>
-            <a:picLocks noChangeAspect="1" noChangeArrowheads="1"/>
-          </p:cNvPicPr>
-          <p:nvPr/>
-        </p:nvPicPr>
-        <p:blipFill>
-          <a:blip r:embed="rId3" cstate="print">
-            <a:clrChange>
-              <a:clrFrom>
-                <a:srgbClr val="FFFFFF"/>
-              </a:clrFrom>
-              <a:clrTo>
-                <a:srgbClr val="FFFFFF">
-                  <a:alpha val="0"/>
-                </a:srgbClr>
-              </a:clrTo>
-            </a:clrChange>
-            <a:extLst>
-              <a:ext uri="{28A0092B-C50C-407E-A947-70E740481C1C}">
-                <a14:useLocalDpi xmlns:a14="http://schemas.microsoft.com/office/drawing/2010/main" val="0"/>
-              </a:ext>
-            </a:extLst>
-          </a:blip>
-          <a:srcRect/>
-          <a:stretch>
-            <a:fillRect/>
-          </a:stretch>
-        </p:blipFill>
-        <p:spPr bwMode="auto">
-          <a:xfrm>
-            <a:off x="10099097" y="4886914"/>
-            <a:ext cx="2092903" cy="1158861"/>
-          </a:xfrm>
-          <a:prstGeom prst="rect">
-            <a:avLst/>
-          </a:prstGeom>
-          <a:noFill/>
-          <a:extLst>
-            <a:ext uri="{909E8E84-426E-40DD-AFC4-6F175D3DCCD1}">
-              <a14:hiddenFill xmlns:a14="http://schemas.microsoft.com/office/drawing/2010/main">
-                <a:solidFill>
-                  <a:srgbClr val="FFFFFF"/>
-                </a:solidFill>
-              </a14:hiddenFill>
-            </a:ext>
-          </a:extLst>
-        </p:spPr>
-      </p:pic>
-    </p:spTree>
-    <p:extLst>
-      <p:ext uri="{BB962C8B-B14F-4D97-AF65-F5344CB8AC3E}">
-        <p14:creationId xmlns:p14="http://schemas.microsoft.com/office/powerpoint/2010/main" val="3921411754"/>
-      </p:ext>
-    </p:extLst>
-  </p:cSld>
-  <p:clrMapOvr>
-    <a:masterClrMapping/>
-  </p:clrMapOvr>
-  <p:timing>
-    <p:tnLst>
-      <p:par>
-        <p:cTn id="1" dur="indefinite" restart="never" nodeType="tmRoot"/>
-      </p:par>
-    </p:tnLst>
-  </p:timing>
-</p:sld>
-</file>
-
-<file path=ppt/slides/slide23.xml><?xml version="1.0" encoding="utf-8"?>
-<p:sld xmlns:a="http://schemas.openxmlformats.org/drawingml/2006/main" xmlns:r="http://schemas.openxmlformats.org/officeDocument/2006/relationships" xmlns:p="http://schemas.openxmlformats.org/presentationml/2006/main">
-  <p:cSld>
-    <p:spTree>
-      <p:nvGrpSpPr>
-        <p:cNvPr id="1" name=""/>
-        <p:cNvGrpSpPr/>
-        <p:nvPr/>
-      </p:nvGrpSpPr>
-      <p:grpSpPr>
-        <a:xfrm>
-          <a:off x="0" y="0"/>
-          <a:ext cx="0" cy="0"/>
-          <a:chOff x="0" y="0"/>
-          <a:chExt cx="0" cy="0"/>
-        </a:xfrm>
-      </p:grpSpPr>
-      <p:sp>
-        <p:nvSpPr>
-          <p:cNvPr id="2" name="Title 1"/>
-          <p:cNvSpPr>
-            <a:spLocks noGrp="1"/>
-          </p:cNvSpPr>
-          <p:nvPr>
-            <p:ph type="title"/>
-          </p:nvPr>
-        </p:nvSpPr>
-        <p:spPr/>
-        <p:txBody>
-          <a:bodyPr/>
-          <a:lstStyle/>
-          <a:p>
-            <a:pPr algn="ctr"/>
-            <a:r>
-              <a:rPr lang="en-GB" dirty="0" smtClean="0"/>
-              <a:t>Life forms</a:t>
-            </a:r>
-            <a:endParaRPr lang="en-GB" dirty="0"/>
-          </a:p>
-        </p:txBody>
-      </p:sp>
-      <p:pic>
-        <p:nvPicPr>
-          <p:cNvPr id="4" name="Content Placeholder 3"/>
-          <p:cNvPicPr>
-            <a:picLocks noGrp="1" noChangeAspect="1"/>
-          </p:cNvPicPr>
-          <p:nvPr>
-            <p:ph idx="1"/>
-          </p:nvPr>
-        </p:nvPicPr>
-        <p:blipFill>
-          <a:blip r:embed="rId2"/>
-          <a:stretch>
-            <a:fillRect/>
-          </a:stretch>
-        </p:blipFill>
-        <p:spPr>
-          <a:xfrm>
-            <a:off x="3790280" y="2016124"/>
-            <a:ext cx="5829969" cy="4082877"/>
-          </a:xfrm>
-          <a:prstGeom prst="rect">
-            <a:avLst/>
-          </a:prstGeom>
-        </p:spPr>
-      </p:pic>
-      <p:pic>
-        <p:nvPicPr>
-          <p:cNvPr id="5" name="Picture 4" descr="Africa wildlife culture Royalty Free Vector Image"/>
-          <p:cNvPicPr>
-            <a:picLocks noChangeAspect="1" noChangeArrowheads="1"/>
-          </p:cNvPicPr>
-          <p:nvPr/>
-        </p:nvPicPr>
-        <p:blipFill>
-          <a:blip r:embed="rId3" cstate="print">
-            <a:clrChange>
-              <a:clrFrom>
-                <a:srgbClr val="FFFFFF"/>
-              </a:clrFrom>
-              <a:clrTo>
-                <a:srgbClr val="FFFFFF">
-                  <a:alpha val="0"/>
-                </a:srgbClr>
-              </a:clrTo>
-            </a:clrChange>
-            <a:extLst>
-              <a:ext uri="{28A0092B-C50C-407E-A947-70E740481C1C}">
-                <a14:useLocalDpi xmlns:a14="http://schemas.microsoft.com/office/drawing/2010/main" val="0"/>
-              </a:ext>
-            </a:extLst>
-          </a:blip>
-          <a:srcRect/>
-          <a:stretch>
-            <a:fillRect/>
-          </a:stretch>
-        </p:blipFill>
-        <p:spPr bwMode="auto">
-          <a:xfrm>
-            <a:off x="10099097" y="4886914"/>
-            <a:ext cx="2092903" cy="1158861"/>
-          </a:xfrm>
-          <a:prstGeom prst="rect">
-            <a:avLst/>
-          </a:prstGeom>
-          <a:noFill/>
-          <a:extLst>
-            <a:ext uri="{909E8E84-426E-40DD-AFC4-6F175D3DCCD1}">
-              <a14:hiddenFill xmlns:a14="http://schemas.microsoft.com/office/drawing/2010/main">
-                <a:solidFill>
-                  <a:srgbClr val="FFFFFF"/>
-                </a:solidFill>
-              </a14:hiddenFill>
-            </a:ext>
-          </a:extLst>
-        </p:spPr>
-      </p:pic>
-    </p:spTree>
-    <p:extLst>
-      <p:ext uri="{BB962C8B-B14F-4D97-AF65-F5344CB8AC3E}">
-        <p14:creationId xmlns:p14="http://schemas.microsoft.com/office/powerpoint/2010/main" val="3798329076"/>
-      </p:ext>
-    </p:extLst>
-  </p:cSld>
-  <p:clrMapOvr>
-    <a:masterClrMapping/>
-  </p:clrMapOvr>
-  <p:timing>
-    <p:tnLst>
-      <p:par>
-        <p:cTn id="1" dur="indefinite" restart="never" nodeType="tmRoot"/>
-      </p:par>
-    </p:tnLst>
-  </p:timing>
-</p:sld>
-</file>
-
-<file path=ppt/slides/slide24.xml><?xml version="1.0" encoding="utf-8"?>
-<p:sld xmlns:a="http://schemas.openxmlformats.org/drawingml/2006/main" xmlns:r="http://schemas.openxmlformats.org/officeDocument/2006/relationships" xmlns:p="http://schemas.openxmlformats.org/presentationml/2006/main">
-  <p:cSld>
-    <p:spTree>
-      <p:nvGrpSpPr>
-        <p:cNvPr id="1" name=""/>
-        <p:cNvGrpSpPr/>
-        <p:nvPr/>
-      </p:nvGrpSpPr>
-      <p:grpSpPr>
-        <a:xfrm>
-          <a:off x="0" y="0"/>
-          <a:ext cx="0" cy="0"/>
-          <a:chOff x="0" y="0"/>
-          <a:chExt cx="0" cy="0"/>
-        </a:xfrm>
-      </p:grpSpPr>
-      <p:sp>
-        <p:nvSpPr>
-          <p:cNvPr id="2" name="Title 1"/>
-          <p:cNvSpPr>
-            <a:spLocks noGrp="1"/>
-          </p:cNvSpPr>
-          <p:nvPr>
-            <p:ph type="title"/>
-          </p:nvPr>
-        </p:nvSpPr>
-        <p:spPr/>
-        <p:txBody>
-          <a:bodyPr/>
-          <a:lstStyle/>
-          <a:p>
-            <a:pPr algn="ctr"/>
-            <a:r>
-              <a:rPr lang="en-GB" dirty="0" smtClean="0"/>
               <a:t>Determining which physical attributes predicted crop type better.</a:t>
             </a:r>
             <a:endParaRPr lang="en-GB" dirty="0"/>
@@ -8938,7 +8365,7 @@
 </p:sld>
 </file>
 
-<file path=ppt/slides/slide25.xml><?xml version="1.0" encoding="utf-8"?>
+<file path=ppt/slides/slide21.xml><?xml version="1.0" encoding="utf-8"?>
 <p:sld xmlns:a="http://schemas.openxmlformats.org/drawingml/2006/main" xmlns:r="http://schemas.openxmlformats.org/officeDocument/2006/relationships" xmlns:p="http://schemas.openxmlformats.org/presentationml/2006/main">
   <p:cSld>
     <p:spTree>
@@ -9149,7 +8576,7 @@
 </p:sld>
 </file>
 
-<file path=ppt/slides/slide26.xml><?xml version="1.0" encoding="utf-8"?>
+<file path=ppt/slides/slide22.xml><?xml version="1.0" encoding="utf-8"?>
 <p:sld xmlns:a="http://schemas.openxmlformats.org/drawingml/2006/main" xmlns:r="http://schemas.openxmlformats.org/officeDocument/2006/relationships" xmlns:p="http://schemas.openxmlformats.org/presentationml/2006/main">
   <p:cSld>
     <p:spTree>
@@ -9389,7 +8816,7 @@
 </p:sld>
 </file>
 
-<file path=ppt/slides/slide27.xml><?xml version="1.0" encoding="utf-8"?>
+<file path=ppt/slides/slide23.xml><?xml version="1.0" encoding="utf-8"?>
 <p:sld xmlns:a="http://schemas.openxmlformats.org/drawingml/2006/main" xmlns:r="http://schemas.openxmlformats.org/officeDocument/2006/relationships" xmlns:p="http://schemas.openxmlformats.org/presentationml/2006/main">
   <p:cSld>
     <p:spTree>
@@ -9535,7 +8962,7 @@
 </p:sld>
 </file>
 
-<file path=ppt/slides/slide28.xml><?xml version="1.0" encoding="utf-8"?>
+<file path=ppt/slides/slide24.xml><?xml version="1.0" encoding="utf-8"?>
 <p:sld xmlns:a="http://schemas.openxmlformats.org/drawingml/2006/main" xmlns:r="http://schemas.openxmlformats.org/officeDocument/2006/relationships" xmlns:p="http://schemas.openxmlformats.org/presentationml/2006/main">
   <p:cSld>
     <p:spTree>
@@ -9684,7 +9111,7 @@
 </p:sld>
 </file>
 
-<file path=ppt/slides/slide29.xml><?xml version="1.0" encoding="utf-8"?>
+<file path=ppt/slides/slide25.xml><?xml version="1.0" encoding="utf-8"?>
 <p:sld xmlns:a="http://schemas.openxmlformats.org/drawingml/2006/main" xmlns:r="http://schemas.openxmlformats.org/officeDocument/2006/relationships" xmlns:p="http://schemas.openxmlformats.org/presentationml/2006/main">
   <p:cSld>
     <p:spTree>
@@ -9819,179 +9246,7 @@
 </p:sld>
 </file>
 
-<file path=ppt/slides/slide3.xml><?xml version="1.0" encoding="utf-8"?>
-<p:sld xmlns:a="http://schemas.openxmlformats.org/drawingml/2006/main" xmlns:r="http://schemas.openxmlformats.org/officeDocument/2006/relationships" xmlns:p="http://schemas.openxmlformats.org/presentationml/2006/main">
-  <p:cSld>
-    <p:spTree>
-      <p:nvGrpSpPr>
-        <p:cNvPr id="1" name=""/>
-        <p:cNvGrpSpPr/>
-        <p:nvPr/>
-      </p:nvGrpSpPr>
-      <p:grpSpPr>
-        <a:xfrm>
-          <a:off x="0" y="0"/>
-          <a:ext cx="0" cy="0"/>
-          <a:chOff x="0" y="0"/>
-          <a:chExt cx="0" cy="0"/>
-        </a:xfrm>
-      </p:grpSpPr>
-      <p:sp>
-        <p:nvSpPr>
-          <p:cNvPr id="2" name="Title 1"/>
-          <p:cNvSpPr>
-            <a:spLocks noGrp="1"/>
-          </p:cNvSpPr>
-          <p:nvPr>
-            <p:ph type="title"/>
-          </p:nvPr>
-        </p:nvSpPr>
-        <p:spPr/>
-        <p:txBody>
-          <a:bodyPr/>
-          <a:lstStyle/>
-          <a:p>
-            <a:pPr algn="ctr"/>
-            <a:r>
-              <a:rPr lang="en-GB" dirty="0"/>
-              <a:t>Highlights</a:t>
-            </a:r>
-          </a:p>
-        </p:txBody>
-      </p:sp>
-      <p:sp>
-        <p:nvSpPr>
-          <p:cNvPr id="3" name="Content Placeholder 2"/>
-          <p:cNvSpPr>
-            <a:spLocks noGrp="1"/>
-          </p:cNvSpPr>
-          <p:nvPr>
-            <p:ph idx="1"/>
-          </p:nvPr>
-        </p:nvSpPr>
-        <p:spPr/>
-        <p:txBody>
-          <a:bodyPr/>
-          <a:lstStyle/>
-          <a:p>
-            <a:r>
-              <a:rPr lang="en-GB" dirty="0"/>
-              <a:t>Project Overview</a:t>
-            </a:r>
-          </a:p>
-          <a:p>
-            <a:r>
-              <a:rPr lang="en-GB" dirty="0"/>
-              <a:t>Business Understanding: Business Problem and Objectives</a:t>
-            </a:r>
-          </a:p>
-          <a:p>
-            <a:r>
-              <a:rPr lang="en-GB" dirty="0"/>
-              <a:t>Data Understanding</a:t>
-            </a:r>
-          </a:p>
-          <a:p>
-            <a:r>
-              <a:rPr lang="en-GB" dirty="0"/>
-              <a:t>Data Preparation</a:t>
-            </a:r>
-          </a:p>
-          <a:p>
-            <a:r>
-              <a:rPr lang="en-GB" dirty="0"/>
-              <a:t>Results</a:t>
-            </a:r>
-          </a:p>
-          <a:p>
-            <a:r>
-              <a:rPr lang="en-GB" dirty="0"/>
-              <a:t>Recommendations</a:t>
-            </a:r>
-          </a:p>
-          <a:p>
-            <a:r>
-              <a:rPr lang="en-GB" dirty="0"/>
-              <a:t>Limitations and Suggestions for further studies</a:t>
-            </a:r>
-          </a:p>
-          <a:p>
-            <a:endParaRPr lang="en-GB" dirty="0"/>
-          </a:p>
-        </p:txBody>
-      </p:sp>
-      <p:pic>
-        <p:nvPicPr>
-          <p:cNvPr id="5" name="Picture 4" descr="Africa wildlife culture Royalty Free Vector Image"/>
-          <p:cNvPicPr>
-            <a:picLocks noChangeAspect="1" noChangeArrowheads="1"/>
-          </p:cNvPicPr>
-          <p:nvPr/>
-        </p:nvPicPr>
-        <p:blipFill>
-          <a:blip r:embed="rId2" cstate="print">
-            <a:clrChange>
-              <a:clrFrom>
-                <a:srgbClr val="FFFFFF"/>
-              </a:clrFrom>
-              <a:clrTo>
-                <a:srgbClr val="FFFFFF">
-                  <a:alpha val="0"/>
-                </a:srgbClr>
-              </a:clrTo>
-            </a:clrChange>
-            <a:extLst>
-              <a:ext uri="{28A0092B-C50C-407E-A947-70E740481C1C}">
-                <a14:useLocalDpi xmlns:a14="http://schemas.microsoft.com/office/drawing/2010/main" val="0"/>
-              </a:ext>
-            </a:extLst>
-          </a:blip>
-          <a:srcRect/>
-          <a:stretch>
-            <a:fillRect/>
-          </a:stretch>
-        </p:blipFill>
-        <p:spPr bwMode="auto">
-          <a:xfrm>
-            <a:off x="10008402" y="0"/>
-            <a:ext cx="2092903" cy="1158861"/>
-          </a:xfrm>
-          <a:prstGeom prst="rect">
-            <a:avLst/>
-          </a:prstGeom>
-          <a:noFill/>
-          <a:extLst>
-            <a:ext uri="{909E8E84-426E-40DD-AFC4-6F175D3DCCD1}">
-              <a14:hiddenFill xmlns:a14="http://schemas.microsoft.com/office/drawing/2010/main">
-                <a:solidFill>
-                  <a:srgbClr val="FFFFFF"/>
-                </a:solidFill>
-              </a14:hiddenFill>
-            </a:ext>
-          </a:extLst>
-        </p:spPr>
-      </p:pic>
-    </p:spTree>
-    <p:extLst>
-      <p:ext uri="{BB962C8B-B14F-4D97-AF65-F5344CB8AC3E}">
-        <p14:creationId xmlns:p14="http://schemas.microsoft.com/office/powerpoint/2010/main" val="1342900700"/>
-      </p:ext>
-    </p:extLst>
-  </p:cSld>
-  <p:clrMapOvr>
-    <a:masterClrMapping/>
-  </p:clrMapOvr>
-  <p:timing>
-    <p:tnLst>
-      <p:par>
-        <p:cTn id="1" dur="indefinite" restart="never" nodeType="tmRoot"/>
-      </p:par>
-    </p:tnLst>
-  </p:timing>
-</p:sld>
-</file>
-
-<file path=ppt/slides/slide30.xml><?xml version="1.0" encoding="utf-8"?>
+<file path=ppt/slides/slide26.xml><?xml version="1.0" encoding="utf-8"?>
 <p:sld xmlns:a="http://schemas.openxmlformats.org/drawingml/2006/main" xmlns:r="http://schemas.openxmlformats.org/officeDocument/2006/relationships" xmlns:p="http://schemas.openxmlformats.org/presentationml/2006/main">
   <p:cSld>
     <p:spTree>
@@ -10185,7 +9440,7 @@
 </p:sld>
 </file>
 
-<file path=ppt/slides/slide31.xml><?xml version="1.0" encoding="utf-8"?>
+<file path=ppt/slides/slide27.xml><?xml version="1.0" encoding="utf-8"?>
 <p:sld xmlns:a="http://schemas.openxmlformats.org/drawingml/2006/main" xmlns:r="http://schemas.openxmlformats.org/officeDocument/2006/relationships" xmlns:p="http://schemas.openxmlformats.org/presentationml/2006/main">
   <p:cSld>
     <p:spTree>
@@ -10384,7 +9639,7 @@
 </p:sld>
 </file>
 
-<file path=ppt/slides/slide32.xml><?xml version="1.0" encoding="utf-8"?>
+<file path=ppt/slides/slide28.xml><?xml version="1.0" encoding="utf-8"?>
 <p:sld xmlns:a="http://schemas.openxmlformats.org/drawingml/2006/main" xmlns:r="http://schemas.openxmlformats.org/officeDocument/2006/relationships" xmlns:p="http://schemas.openxmlformats.org/presentationml/2006/main">
   <p:cSld>
     <p:spTree>
@@ -10560,7 +9815,7 @@
 </p:sld>
 </file>
 
-<file path=ppt/slides/slide33.xml><?xml version="1.0" encoding="utf-8"?>
+<file path=ppt/slides/slide29.xml><?xml version="1.0" encoding="utf-8"?>
 <p:sld xmlns:a="http://schemas.openxmlformats.org/drawingml/2006/main" xmlns:r="http://schemas.openxmlformats.org/officeDocument/2006/relationships" xmlns:p="http://schemas.openxmlformats.org/presentationml/2006/main">
   <p:cSld>
     <p:spTree>
@@ -10670,6 +9925,178 @@
     <p:extLst>
       <p:ext uri="{BB962C8B-B14F-4D97-AF65-F5344CB8AC3E}">
         <p14:creationId xmlns:p14="http://schemas.microsoft.com/office/powerpoint/2010/main" val="3993706161"/>
+      </p:ext>
+    </p:extLst>
+  </p:cSld>
+  <p:clrMapOvr>
+    <a:masterClrMapping/>
+  </p:clrMapOvr>
+  <p:timing>
+    <p:tnLst>
+      <p:par>
+        <p:cTn id="1" dur="indefinite" restart="never" nodeType="tmRoot"/>
+      </p:par>
+    </p:tnLst>
+  </p:timing>
+</p:sld>
+</file>
+
+<file path=ppt/slides/slide3.xml><?xml version="1.0" encoding="utf-8"?>
+<p:sld xmlns:a="http://schemas.openxmlformats.org/drawingml/2006/main" xmlns:r="http://schemas.openxmlformats.org/officeDocument/2006/relationships" xmlns:p="http://schemas.openxmlformats.org/presentationml/2006/main">
+  <p:cSld>
+    <p:spTree>
+      <p:nvGrpSpPr>
+        <p:cNvPr id="1" name=""/>
+        <p:cNvGrpSpPr/>
+        <p:nvPr/>
+      </p:nvGrpSpPr>
+      <p:grpSpPr>
+        <a:xfrm>
+          <a:off x="0" y="0"/>
+          <a:ext cx="0" cy="0"/>
+          <a:chOff x="0" y="0"/>
+          <a:chExt cx="0" cy="0"/>
+        </a:xfrm>
+      </p:grpSpPr>
+      <p:sp>
+        <p:nvSpPr>
+          <p:cNvPr id="2" name="Title 1"/>
+          <p:cNvSpPr>
+            <a:spLocks noGrp="1"/>
+          </p:cNvSpPr>
+          <p:nvPr>
+            <p:ph type="title"/>
+          </p:nvPr>
+        </p:nvSpPr>
+        <p:spPr/>
+        <p:txBody>
+          <a:bodyPr/>
+          <a:lstStyle/>
+          <a:p>
+            <a:pPr algn="ctr"/>
+            <a:r>
+              <a:rPr lang="en-GB" dirty="0"/>
+              <a:t>Highlights</a:t>
+            </a:r>
+          </a:p>
+        </p:txBody>
+      </p:sp>
+      <p:sp>
+        <p:nvSpPr>
+          <p:cNvPr id="3" name="Content Placeholder 2"/>
+          <p:cNvSpPr>
+            <a:spLocks noGrp="1"/>
+          </p:cNvSpPr>
+          <p:nvPr>
+            <p:ph idx="1"/>
+          </p:nvPr>
+        </p:nvSpPr>
+        <p:spPr/>
+        <p:txBody>
+          <a:bodyPr/>
+          <a:lstStyle/>
+          <a:p>
+            <a:r>
+              <a:rPr lang="en-GB" dirty="0"/>
+              <a:t>Project Overview</a:t>
+            </a:r>
+          </a:p>
+          <a:p>
+            <a:r>
+              <a:rPr lang="en-GB" dirty="0"/>
+              <a:t>Business Understanding: Business Problem and Objectives</a:t>
+            </a:r>
+          </a:p>
+          <a:p>
+            <a:r>
+              <a:rPr lang="en-GB" dirty="0"/>
+              <a:t>Data Understanding</a:t>
+            </a:r>
+          </a:p>
+          <a:p>
+            <a:r>
+              <a:rPr lang="en-GB" dirty="0"/>
+              <a:t>Data Preparation</a:t>
+            </a:r>
+          </a:p>
+          <a:p>
+            <a:r>
+              <a:rPr lang="en-GB" dirty="0"/>
+              <a:t>Results</a:t>
+            </a:r>
+          </a:p>
+          <a:p>
+            <a:r>
+              <a:rPr lang="en-GB" dirty="0"/>
+              <a:t>Recommendations</a:t>
+            </a:r>
+          </a:p>
+          <a:p>
+            <a:r>
+              <a:rPr lang="en-GB" dirty="0"/>
+              <a:t>Limitations and Suggestions for further studies</a:t>
+            </a:r>
+          </a:p>
+          <a:p>
+            <a:endParaRPr lang="en-GB" dirty="0"/>
+          </a:p>
+        </p:txBody>
+      </p:sp>
+      <p:pic>
+        <p:nvPicPr>
+          <p:cNvPr id="5" name="Picture 4" descr="Africa wildlife culture Royalty Free Vector Image"/>
+          <p:cNvPicPr>
+            <a:picLocks noChangeAspect="1" noChangeArrowheads="1"/>
+          </p:cNvPicPr>
+          <p:nvPr/>
+        </p:nvPicPr>
+        <p:blipFill>
+          <a:blip r:embed="rId2" cstate="print">
+            <a:clrChange>
+              <a:clrFrom>
+                <a:srgbClr val="FFFFFF"/>
+              </a:clrFrom>
+              <a:clrTo>
+                <a:srgbClr val="FFFFFF">
+                  <a:alpha val="0"/>
+                </a:srgbClr>
+              </a:clrTo>
+            </a:clrChange>
+            <a:extLst>
+              <a:ext uri="{28A0092B-C50C-407E-A947-70E740481C1C}">
+                <a14:useLocalDpi xmlns:a14="http://schemas.microsoft.com/office/drawing/2010/main" val="0"/>
+              </a:ext>
+            </a:extLst>
+          </a:blip>
+          <a:srcRect/>
+          <a:stretch>
+            <a:fillRect/>
+          </a:stretch>
+        </p:blipFill>
+        <p:spPr bwMode="auto">
+          <a:xfrm>
+            <a:off x="10008402" y="0"/>
+            <a:ext cx="2092903" cy="1158861"/>
+          </a:xfrm>
+          <a:prstGeom prst="rect">
+            <a:avLst/>
+          </a:prstGeom>
+          <a:noFill/>
+          <a:extLst>
+            <a:ext uri="{909E8E84-426E-40DD-AFC4-6F175D3DCCD1}">
+              <a14:hiddenFill xmlns:a14="http://schemas.microsoft.com/office/drawing/2010/main">
+                <a:solidFill>
+                  <a:srgbClr val="FFFFFF"/>
+                </a:solidFill>
+              </a14:hiddenFill>
+            </a:ext>
+          </a:extLst>
+        </p:spPr>
+      </p:pic>
+    </p:spTree>
+    <p:extLst>
+      <p:ext uri="{BB962C8B-B14F-4D97-AF65-F5344CB8AC3E}">
+        <p14:creationId xmlns:p14="http://schemas.microsoft.com/office/powerpoint/2010/main" val="1342900700"/>
       </p:ext>
     </p:extLst>
   </p:cSld>
